--- a/prezentacie/t02w.pptx
+++ b/prezentacie/t02w.pptx
@@ -256,7 +256,7 @@
           <a:p>
             <a:fld id="{10052495-8BC8-4CFB-94B1-B0429F101A0D}" type="datetimeFigureOut">
               <a:rPr lang="sk-SK" smtClean="0"/>
-              <a:t>16. 9. 2025</a:t>
+              <a:t>8. 9. 2026</a:t>
             </a:fld>
             <a:endParaRPr lang="sk-SK"/>
           </a:p>
@@ -426,7 +426,7 @@
           <a:p>
             <a:fld id="{10052495-8BC8-4CFB-94B1-B0429F101A0D}" type="datetimeFigureOut">
               <a:rPr lang="sk-SK" smtClean="0"/>
-              <a:t>16. 9. 2025</a:t>
+              <a:t>8. 9. 2026</a:t>
             </a:fld>
             <a:endParaRPr lang="sk-SK"/>
           </a:p>
@@ -606,7 +606,7 @@
           <a:p>
             <a:fld id="{10052495-8BC8-4CFB-94B1-B0429F101A0D}" type="datetimeFigureOut">
               <a:rPr lang="sk-SK" smtClean="0"/>
-              <a:t>16. 9. 2025</a:t>
+              <a:t>8. 9. 2026</a:t>
             </a:fld>
             <a:endParaRPr lang="sk-SK"/>
           </a:p>
@@ -776,7 +776,7 @@
           <a:p>
             <a:fld id="{10052495-8BC8-4CFB-94B1-B0429F101A0D}" type="datetimeFigureOut">
               <a:rPr lang="sk-SK" smtClean="0"/>
-              <a:t>16. 9. 2025</a:t>
+              <a:t>8. 9. 2026</a:t>
             </a:fld>
             <a:endParaRPr lang="sk-SK"/>
           </a:p>
@@ -1022,7 +1022,7 @@
           <a:p>
             <a:fld id="{10052495-8BC8-4CFB-94B1-B0429F101A0D}" type="datetimeFigureOut">
               <a:rPr lang="sk-SK" smtClean="0"/>
-              <a:t>16. 9. 2025</a:t>
+              <a:t>8. 9. 2026</a:t>
             </a:fld>
             <a:endParaRPr lang="sk-SK"/>
           </a:p>
@@ -1254,7 +1254,7 @@
           <a:p>
             <a:fld id="{10052495-8BC8-4CFB-94B1-B0429F101A0D}" type="datetimeFigureOut">
               <a:rPr lang="sk-SK" smtClean="0"/>
-              <a:t>16. 9. 2025</a:t>
+              <a:t>8. 9. 2026</a:t>
             </a:fld>
             <a:endParaRPr lang="sk-SK"/>
           </a:p>
@@ -1621,7 +1621,7 @@
           <a:p>
             <a:fld id="{10052495-8BC8-4CFB-94B1-B0429F101A0D}" type="datetimeFigureOut">
               <a:rPr lang="sk-SK" smtClean="0"/>
-              <a:t>16. 9. 2025</a:t>
+              <a:t>8. 9. 2026</a:t>
             </a:fld>
             <a:endParaRPr lang="sk-SK"/>
           </a:p>
@@ -1739,7 +1739,7 @@
           <a:p>
             <a:fld id="{10052495-8BC8-4CFB-94B1-B0429F101A0D}" type="datetimeFigureOut">
               <a:rPr lang="sk-SK" smtClean="0"/>
-              <a:t>16. 9. 2025</a:t>
+              <a:t>8. 9. 2026</a:t>
             </a:fld>
             <a:endParaRPr lang="sk-SK"/>
           </a:p>
@@ -1834,7 +1834,7 @@
           <a:p>
             <a:fld id="{10052495-8BC8-4CFB-94B1-B0429F101A0D}" type="datetimeFigureOut">
               <a:rPr lang="sk-SK" smtClean="0"/>
-              <a:t>16. 9. 2025</a:t>
+              <a:t>8. 9. 2026</a:t>
             </a:fld>
             <a:endParaRPr lang="sk-SK"/>
           </a:p>
@@ -2111,7 +2111,7 @@
           <a:p>
             <a:fld id="{10052495-8BC8-4CFB-94B1-B0429F101A0D}" type="datetimeFigureOut">
               <a:rPr lang="sk-SK" smtClean="0"/>
-              <a:t>16. 9. 2025</a:t>
+              <a:t>8. 9. 2026</a:t>
             </a:fld>
             <a:endParaRPr lang="sk-SK"/>
           </a:p>
@@ -2368,7 +2368,7 @@
           <a:p>
             <a:fld id="{10052495-8BC8-4CFB-94B1-B0429F101A0D}" type="datetimeFigureOut">
               <a:rPr lang="sk-SK" smtClean="0"/>
-              <a:t>16. 9. 2025</a:t>
+              <a:t>8. 9. 2026</a:t>
             </a:fld>
             <a:endParaRPr lang="sk-SK"/>
           </a:p>
@@ -2581,7 +2581,7 @@
           <a:p>
             <a:fld id="{10052495-8BC8-4CFB-94B1-B0429F101A0D}" type="datetimeFigureOut">
               <a:rPr lang="sk-SK" smtClean="0"/>
-              <a:t>16. 9. 2025</a:t>
+              <a:t>8. 9. 2026</a:t>
             </a:fld>
             <a:endParaRPr lang="sk-SK"/>
           </a:p>
@@ -3507,7 +3507,15 @@
             </a:br>
             <a:r>
               <a:rPr lang="sk-SK" b="1" dirty="0"/>
-              <a:t>Ing. Jozef Wagner PhD.</a:t>
+              <a:t>Ing. </a:t>
+            </a:r>
+            <a:r>
+              <a:rPr lang="sk-SK" b="1"/>
+              <a:t>Jozef Wagner, </a:t>
+            </a:r>
+            <a:r>
+              <a:rPr lang="sk-SK" b="1" dirty="0"/>
+              <a:t>PhD.</a:t>
             </a:r>
           </a:p>
           <a:p>
@@ -3666,11 +3674,19 @@
               </a:spcBef>
             </a:pPr>
             <a:r>
-              <a:rPr lang="sk-SK" sz="2800" dirty="0"/>
+              <a:rPr lang="sk-SK" sz="2800" dirty="0">
+                <a:highlight>
+                  <a:srgbClr val="00FFFF"/>
+                </a:highlight>
+              </a:rPr>
               <a:t>Premenná má </a:t>
             </a:r>
             <a:r>
-              <a:rPr lang="sk-SK" sz="2800" b="1" dirty="0"/>
+              <a:rPr lang="sk-SK" sz="2800" b="1" dirty="0">
+                <a:highlight>
+                  <a:srgbClr val="00FFFF"/>
+                </a:highlight>
+              </a:rPr>
               <a:t>typ, názov a hodnotu</a:t>
             </a:r>
           </a:p>
@@ -3681,11 +3697,18 @@
               </a:spcBef>
             </a:pPr>
             <a:r>
-              <a:rPr lang="sk-SK" sz="2800" dirty="0"/>
+              <a:rPr lang="sk-SK" sz="2800" dirty="0">
+                <a:highlight>
+                  <a:srgbClr val="00FFFF"/>
+                </a:highlight>
+              </a:rPr>
               <a:t>Príklad: </a:t>
             </a:r>
             <a:r>
               <a:rPr lang="sk-SK" sz="2800" dirty="0" err="1">
+                <a:solidFill>
+                  <a:srgbClr val="C00000"/>
+                </a:solidFill>
                 <a:highlight>
                   <a:srgbClr val="FFFF00"/>
                 </a:highlight>
@@ -3695,6 +3718,9 @@
             </a:r>
             <a:r>
               <a:rPr lang="sk-SK" sz="2800" dirty="0">
+                <a:solidFill>
+                  <a:srgbClr val="C00000"/>
+                </a:solidFill>
                 <a:highlight>
                   <a:srgbClr val="FFFF00"/>
                 </a:highlight>
@@ -3710,7 +3736,11 @@
               </a:spcBef>
             </a:pPr>
             <a:r>
-              <a:rPr lang="sk-SK" sz="2800" dirty="0"/>
+              <a:rPr lang="sk-SK" sz="2800" dirty="0">
+                <a:highlight>
+                  <a:srgbClr val="00FFFF"/>
+                </a:highlight>
+              </a:rPr>
               <a:t>Neprimitívna premenná obsahuje referenciu na objekt</a:t>
             </a:r>
           </a:p>
@@ -3721,12 +3751,16 @@
               </a:spcBef>
             </a:pPr>
             <a:r>
-              <a:rPr lang="sk-SK" sz="2800" dirty="0"/>
+              <a:rPr lang="sk-SK" sz="2800" dirty="0">
+                <a:highlight>
+                  <a:srgbClr val="00FFFF"/>
+                </a:highlight>
+              </a:rPr>
               <a:t>Viacero premenných môže ukazovať na ten istý objekt</a:t>
             </a:r>
             <a:endParaRPr lang="sk-SK" sz="2800" dirty="0">
               <a:highlight>
-                <a:srgbClr val="FFFF00"/>
+                <a:srgbClr val="00FFFF"/>
               </a:highlight>
               <a:latin typeface="Consolas" panose="020B0609020204030204" pitchFamily="49" charset="0"/>
             </a:endParaRPr>
@@ -4445,7 +4479,11 @@
               <a:buNone/>
             </a:pPr>
             <a:r>
-              <a:rPr lang="sk-SK" dirty="0"/>
+              <a:rPr lang="sk-SK" dirty="0">
+                <a:highlight>
+                  <a:srgbClr val="00FFFF"/>
+                </a:highlight>
+              </a:rPr>
               <a:t>Konštanty:</a:t>
             </a:r>
           </a:p>
@@ -4456,7 +4494,11 @@
               </a:spcBef>
             </a:pPr>
             <a:r>
-              <a:rPr lang="sk-SK" sz="2800" dirty="0"/>
+              <a:rPr lang="sk-SK" sz="2800" dirty="0">
+                <a:highlight>
+                  <a:srgbClr val="00FFFF"/>
+                </a:highlight>
+              </a:rPr>
               <a:t>Sú ako premenné, ale nemôžu meniť svoju hodnotu</a:t>
             </a:r>
           </a:p>
@@ -4467,11 +4509,18 @@
               </a:spcBef>
             </a:pPr>
             <a:r>
-              <a:rPr lang="sk-SK" sz="2800" dirty="0"/>
+              <a:rPr lang="sk-SK" sz="2800" dirty="0">
+                <a:highlight>
+                  <a:srgbClr val="00FFFF"/>
+                </a:highlight>
+              </a:rPr>
               <a:t>Deklarujeme ich pomocou slovíčka </a:t>
             </a:r>
             <a:r>
               <a:rPr lang="sk-SK" sz="2800" dirty="0" err="1">
+                <a:solidFill>
+                  <a:srgbClr val="C00000"/>
+                </a:solidFill>
                 <a:highlight>
                   <a:srgbClr val="FFFF00"/>
                 </a:highlight>
@@ -4480,6 +4529,9 @@
               <a:t>final</a:t>
             </a:r>
             <a:endParaRPr lang="sk-SK" sz="2800" dirty="0">
+              <a:solidFill>
+                <a:srgbClr val="C00000"/>
+              </a:solidFill>
               <a:highlight>
                 <a:srgbClr val="FFFF00"/>
               </a:highlight>
@@ -4493,7 +4545,11 @@
               </a:spcBef>
             </a:pPr>
             <a:r>
-              <a:rPr lang="sk-SK" sz="2800" dirty="0"/>
+              <a:rPr lang="sk-SK" sz="2800" dirty="0">
+                <a:highlight>
+                  <a:srgbClr val="00FFFF"/>
+                </a:highlight>
+              </a:rPr>
               <a:t>Ak chceme neprimitívnu konštantu, objekt musí byť nemenný</a:t>
             </a:r>
           </a:p>
@@ -4504,11 +4560,18 @@
               </a:spcBef>
             </a:pPr>
             <a:r>
-              <a:rPr lang="sk-SK" sz="2800" dirty="0"/>
+              <a:rPr lang="sk-SK" sz="2800" dirty="0">
+                <a:highlight>
+                  <a:srgbClr val="00FFFF"/>
+                </a:highlight>
+              </a:rPr>
               <a:t>Príklad: </a:t>
             </a:r>
             <a:r>
               <a:rPr lang="sk-SK" sz="2800" b="1" dirty="0" err="1">
+                <a:solidFill>
+                  <a:srgbClr val="C00000"/>
+                </a:solidFill>
                 <a:highlight>
                   <a:srgbClr val="FFFF00"/>
                 </a:highlight>
@@ -4518,6 +4581,9 @@
             </a:r>
             <a:r>
               <a:rPr lang="sk-SK" sz="2800" dirty="0">
+                <a:solidFill>
+                  <a:srgbClr val="C00000"/>
+                </a:solidFill>
                 <a:highlight>
                   <a:srgbClr val="FFFF00"/>
                 </a:highlight>
@@ -4527,6 +4593,9 @@
             </a:r>
             <a:r>
               <a:rPr lang="sk-SK" sz="2800" dirty="0" err="1">
+                <a:solidFill>
+                  <a:srgbClr val="C00000"/>
+                </a:solidFill>
                 <a:highlight>
                   <a:srgbClr val="FFFF00"/>
                 </a:highlight>
@@ -4536,6 +4605,9 @@
             </a:r>
             <a:r>
               <a:rPr lang="sk-SK" sz="2800" dirty="0">
+                <a:solidFill>
+                  <a:srgbClr val="C00000"/>
+                </a:solidFill>
                 <a:highlight>
                   <a:srgbClr val="FFFF00"/>
                 </a:highlight>
@@ -5179,7 +5251,11 @@
           <a:lstStyle/>
           <a:p>
             <a:r>
-              <a:rPr lang="sk-SK" sz="4000" dirty="0"/>
+              <a:rPr lang="sk-SK" sz="4000" dirty="0">
+                <a:highlight>
+                  <a:srgbClr val="00FFFF"/>
+                </a:highlight>
+              </a:rPr>
               <a:t>Algoritmus</a:t>
             </a:r>
           </a:p>
@@ -5220,7 +5296,11 @@
               <a:buNone/>
             </a:pPr>
             <a:r>
-              <a:rPr lang="sk-SK" dirty="0"/>
+              <a:rPr lang="sk-SK" dirty="0">
+                <a:highlight>
+                  <a:srgbClr val="00FFFF"/>
+                </a:highlight>
+              </a:rPr>
               <a:t>Postupnosť presne definovaných krokov na dosiahnutie výsledku. </a:t>
             </a:r>
             <a:br>
@@ -5533,7 +5613,15 @@
             </a:pPr>
             <a:r>
               <a:rPr lang="sk-SK" dirty="0"/>
-              <a:t>Java má 8 primitívnych dátových typov</a:t>
+              <a:t>Java má </a:t>
+            </a:r>
+            <a:r>
+              <a:rPr lang="sk-SK" dirty="0">
+                <a:highlight>
+                  <a:srgbClr val="00FFFF"/>
+                </a:highlight>
+              </a:rPr>
+              <a:t>8 primitívnych dátových typov</a:t>
             </a:r>
           </a:p>
           <a:p>
@@ -5544,6 +5632,9 @@
             </a:pPr>
             <a:r>
               <a:rPr lang="sk-SK" sz="2800" dirty="0">
+                <a:solidFill>
+                  <a:srgbClr val="C00000"/>
+                </a:solidFill>
                 <a:highlight>
                   <a:srgbClr val="FFFF00"/>
                 </a:highlight>
@@ -5560,6 +5651,9 @@
             </a:pPr>
             <a:r>
               <a:rPr lang="sk-SK" sz="2800" dirty="0">
+                <a:solidFill>
+                  <a:srgbClr val="C00000"/>
+                </a:solidFill>
                 <a:highlight>
                   <a:srgbClr val="FFFF00"/>
                 </a:highlight>
@@ -5573,6 +5667,9 @@
             </a:r>
             <a:r>
               <a:rPr lang="sk-SK" sz="2800" dirty="0" err="1">
+                <a:solidFill>
+                  <a:srgbClr val="C00000"/>
+                </a:solidFill>
                 <a:highlight>
                   <a:srgbClr val="FFFF00"/>
                 </a:highlight>
@@ -5586,6 +5683,9 @@
             </a:r>
             <a:r>
               <a:rPr lang="sk-SK" sz="2800" dirty="0" err="1">
+                <a:solidFill>
+                  <a:srgbClr val="C00000"/>
+                </a:solidFill>
                 <a:highlight>
                   <a:srgbClr val="FFFF00"/>
                 </a:highlight>
@@ -5599,6 +5699,9 @@
             </a:r>
             <a:r>
               <a:rPr lang="sk-SK" sz="2800" dirty="0" err="1">
+                <a:solidFill>
+                  <a:srgbClr val="C00000"/>
+                </a:solidFill>
                 <a:highlight>
                   <a:srgbClr val="FFFF00"/>
                 </a:highlight>
@@ -5607,6 +5710,9 @@
               <a:t>long</a:t>
             </a:r>
             <a:endParaRPr lang="sk-SK" sz="2800" dirty="0">
+              <a:solidFill>
+                <a:srgbClr val="C00000"/>
+              </a:solidFill>
               <a:highlight>
                 <a:srgbClr val="FFFF00"/>
               </a:highlight>
@@ -5621,6 +5727,9 @@
             </a:pPr>
             <a:r>
               <a:rPr lang="sk-SK" sz="2800" dirty="0" err="1">
+                <a:solidFill>
+                  <a:srgbClr val="C00000"/>
+                </a:solidFill>
                 <a:highlight>
                   <a:srgbClr val="FFFF00"/>
                 </a:highlight>
@@ -5634,6 +5743,9 @@
             </a:r>
             <a:r>
               <a:rPr lang="sk-SK" sz="2800" dirty="0" err="1">
+                <a:solidFill>
+                  <a:srgbClr val="C00000"/>
+                </a:solidFill>
                 <a:highlight>
                   <a:srgbClr val="FFFF00"/>
                 </a:highlight>
@@ -5642,6 +5754,9 @@
               <a:t>double</a:t>
             </a:r>
             <a:endParaRPr lang="sk-SK" sz="2800" dirty="0">
+              <a:solidFill>
+                <a:srgbClr val="C00000"/>
+              </a:solidFill>
               <a:highlight>
                 <a:srgbClr val="FFFF00"/>
               </a:highlight>
@@ -5656,6 +5771,9 @@
             </a:pPr>
             <a:r>
               <a:rPr lang="sk-SK" sz="2800" dirty="0" err="1">
+                <a:solidFill>
+                  <a:srgbClr val="C00000"/>
+                </a:solidFill>
                 <a:highlight>
                   <a:srgbClr val="FFFF00"/>
                 </a:highlight>
@@ -5664,6 +5782,9 @@
               <a:t>char</a:t>
             </a:r>
             <a:endParaRPr lang="sk-SK" sz="2800" dirty="0">
+              <a:solidFill>
+                <a:srgbClr val="C00000"/>
+              </a:solidFill>
               <a:highlight>
                 <a:srgbClr val="FFFF00"/>
               </a:highlight>
@@ -5781,7 +5902,11 @@
               <a:buNone/>
             </a:pPr>
             <a:r>
-              <a:rPr lang="sk-SK" dirty="0"/>
+              <a:rPr lang="sk-SK" dirty="0">
+                <a:highlight>
+                  <a:srgbClr val="00FFFF"/>
+                </a:highlight>
+              </a:rPr>
               <a:t>Neprimitívne dátové typy</a:t>
             </a:r>
           </a:p>
@@ -5792,7 +5917,11 @@
               </a:spcBef>
             </a:pPr>
             <a:r>
-              <a:rPr lang="sk-SK" sz="2800" dirty="0"/>
+              <a:rPr lang="sk-SK" sz="2800" dirty="0">
+                <a:highlight>
+                  <a:srgbClr val="00FFFF"/>
+                </a:highlight>
+              </a:rPr>
               <a:t>Vieme si vytvárať vlastné</a:t>
             </a:r>
           </a:p>
@@ -5803,7 +5932,11 @@
               </a:spcBef>
             </a:pPr>
             <a:r>
-              <a:rPr lang="sk-SK" sz="2800" dirty="0"/>
+              <a:rPr lang="sk-SK" sz="2800" dirty="0">
+                <a:highlight>
+                  <a:srgbClr val="00FFFF"/>
+                </a:highlight>
+              </a:rPr>
               <a:t>Ich hodnoty sú objekty</a:t>
             </a:r>
           </a:p>
@@ -5814,11 +5947,18 @@
               </a:spcBef>
             </a:pPr>
             <a:r>
-              <a:rPr lang="sk-SK" sz="2800" dirty="0"/>
+              <a:rPr lang="sk-SK" sz="2800" dirty="0">
+                <a:highlight>
+                  <a:srgbClr val="00FFFF"/>
+                </a:highlight>
+              </a:rPr>
               <a:t>Príklad: </a:t>
             </a:r>
             <a:r>
               <a:rPr lang="sk-SK" sz="2800" dirty="0" err="1">
+                <a:solidFill>
+                  <a:srgbClr val="C00000"/>
+                </a:solidFill>
                 <a:highlight>
                   <a:srgbClr val="FFFF00"/>
                 </a:highlight>
@@ -5827,11 +5967,18 @@
               <a:t>File</a:t>
             </a:r>
             <a:r>
-              <a:rPr lang="sk-SK" sz="2800" dirty="0"/>
+              <a:rPr lang="sk-SK" sz="2800" dirty="0">
+                <a:solidFill>
+                  <a:srgbClr val="C00000"/>
+                </a:solidFill>
+              </a:rPr>
               <a:t>, </a:t>
             </a:r>
             <a:r>
               <a:rPr lang="sk-SK" sz="2800" dirty="0" err="1">
+                <a:solidFill>
+                  <a:srgbClr val="C00000"/>
+                </a:solidFill>
                 <a:highlight>
                   <a:srgbClr val="FFFF00"/>
                 </a:highlight>
@@ -5840,11 +5987,18 @@
               <a:t>Date</a:t>
             </a:r>
             <a:r>
-              <a:rPr lang="sk-SK" sz="2800" dirty="0"/>
+              <a:rPr lang="sk-SK" sz="2800" dirty="0">
+                <a:solidFill>
+                  <a:srgbClr val="C00000"/>
+                </a:solidFill>
+              </a:rPr>
               <a:t>, </a:t>
             </a:r>
             <a:r>
               <a:rPr lang="sk-SK" sz="2800" dirty="0" err="1">
+                <a:solidFill>
+                  <a:srgbClr val="C00000"/>
+                </a:solidFill>
                 <a:highlight>
                   <a:srgbClr val="FFFF00"/>
                 </a:highlight>
@@ -5853,11 +6007,18 @@
               <a:t>Map</a:t>
             </a:r>
             <a:r>
-              <a:rPr lang="sk-SK" sz="2800" dirty="0"/>
+              <a:rPr lang="sk-SK" sz="2800" dirty="0">
+                <a:solidFill>
+                  <a:srgbClr val="C00000"/>
+                </a:solidFill>
+              </a:rPr>
               <a:t>, </a:t>
             </a:r>
             <a:r>
               <a:rPr lang="sk-SK" sz="2800" dirty="0" err="1">
+                <a:solidFill>
+                  <a:srgbClr val="C00000"/>
+                </a:solidFill>
                 <a:highlight>
                   <a:srgbClr val="FFFF00"/>
                 </a:highlight>
@@ -5866,11 +6027,18 @@
               <a:t>String</a:t>
             </a:r>
             <a:r>
-              <a:rPr lang="sk-SK" sz="2800" dirty="0"/>
+              <a:rPr lang="sk-SK" sz="2800" dirty="0">
+                <a:solidFill>
+                  <a:srgbClr val="C00000"/>
+                </a:solidFill>
+              </a:rPr>
               <a:t>, </a:t>
             </a:r>
             <a:r>
               <a:rPr lang="sk-SK" sz="2800" dirty="0" err="1">
+                <a:solidFill>
+                  <a:srgbClr val="C00000"/>
+                </a:solidFill>
                 <a:highlight>
                   <a:srgbClr val="FFFF00"/>
                 </a:highlight>
@@ -5879,6 +6047,9 @@
               <a:t>Array</a:t>
             </a:r>
             <a:endParaRPr lang="sk-SK" sz="2800" dirty="0">
+              <a:solidFill>
+                <a:srgbClr val="C00000"/>
+              </a:solidFill>
               <a:highlight>
                 <a:srgbClr val="FFFF00"/>
               </a:highlight>
@@ -6582,12 +6753,16 @@
               <a:buNone/>
             </a:pPr>
             <a:r>
-              <a:rPr lang="sk-SK" dirty="0"/>
-              <a:t>Premenná je pomenovanie alebo názov nejakého miesta v pamäti počítača, na ktoré potom môžem ukladať údaje</a:t>
+              <a:rPr lang="sk-SK" dirty="0">
+                <a:highlight>
+                  <a:srgbClr val="00FFFF"/>
+                </a:highlight>
+              </a:rPr>
+              <a:t>Premenná je pomenovanie nejakého miesta v pamäti počítača, na ktoré potom môžem ukladať údaje</a:t>
             </a:r>
             <a:endParaRPr lang="sk-SK" dirty="0">
               <a:highlight>
-                <a:srgbClr val="FFFF00"/>
+                <a:srgbClr val="00FFFF"/>
               </a:highlight>
               <a:latin typeface="Consolas" panose="020B0609020204030204" pitchFamily="49" charset="0"/>
             </a:endParaRPr>
